--- a/public/fun/pack/pptx/family/가족소개_27_아이와함께_한가위달.pptx
+++ b/public/fun/pack/pptx/family/가족소개_27_아이와함께_한가위달.pptx
@@ -3286,6 +3286,14 @@
 <file path=ppt/slides/slide1.xml><?xml version="1.0" encoding="utf-8"?>
 <p:sld xmlns:a="http://schemas.openxmlformats.org/drawingml/2006/main" xmlns:p="http://schemas.openxmlformats.org/presentationml/2006/main" xmlns:r="http://schemas.openxmlformats.org/officeDocument/2006/relationships">
   <p:cSld>
+    <p:bg>
+      <p:bgPr>
+        <a:solidFill>
+          <a:srgbClr val="FBF6EC"/>
+        </a:solidFill>
+        <a:effectLst/>
+      </p:bgPr>
+    </p:bg>
     <p:spTree>
       <p:nvGrpSpPr>
         <p:cNvPr id="1" name=""/>
@@ -3293,30 +3301,119 @@
         <p:nvPr/>
       </p:nvGrpSpPr>
       <p:grpSpPr/>
-      <p:pic>
-        <p:nvPicPr>
-          <p:cNvPr id="3" name="표지 그림" descr="family-27.jpg"/>
-          <p:cNvPicPr>
-            <a:picLocks noChangeAspect="1"/>
-          </p:cNvPicPr>
-          <p:nvPr/>
-        </p:nvPicPr>
-        <p:blipFill>
-          <a:blip r:embed="rId2"/>
-          <a:stretch>
-            <a:fillRect/>
-          </a:stretch>
-        </p:blipFill>
-        <p:spPr>
-          <a:xfrm>
-            <a:off x="0" y="0"/>
-            <a:ext cx="12191695" cy="6858000"/>
+      <p:sp>
+        <p:nvSpPr>
+          <p:cNvPr id="3" name="사진 자리"/>
+          <p:cNvSpPr/>
+          <p:nvPr/>
+        </p:nvSpPr>
+        <p:spPr>
+          <a:xfrm>
+            <a:off x="1463003" y="685800"/>
+            <a:ext cx="3169840" cy="5486400"/>
+          </a:xfrm>
+          <a:prstGeom prst="round2SameRect">
+            <a:avLst>
+              <a:gd name="adj1" fmla="val 50000"/>
+              <a:gd name="adj2" fmla="val 0"/>
+            </a:avLst>
+          </a:prstGeom>
+          <a:solidFill>
+            <a:srgbClr val="EBD6AD"/>
+          </a:solidFill>
+          <a:ln>
+            <a:noFill/>
+          </a:ln>
+        </p:spPr>
+        <p:txBody>
+          <a:bodyPr rtlCol="0" anchor="ctr" wrap="square" lIns="54864" rIns="54864" tIns="27432" bIns="27432">
+            <a:noAutofit/>
+          </a:bodyPr>
+          <a:lstStyle/>
+          <a:p>
+            <a:pPr algn="ctr">
+              <a:lnSpc>
+                <a:spcPct val="100000"/>
+              </a:lnSpc>
+            </a:pPr>
+            <a:r>
+              <a:rPr sz="1400" b="0" i="0">
+                <a:solidFill>
+                  <a:srgbClr val="493E27"/>
+                </a:solidFill>
+              </a:rPr>
+              <a:t>사진을 넣어 주세요</a:t>
+            </a:r>
+          </a:p>
+        </p:txBody>
+      </p:sp>
+      <p:sp>
+        <p:nvSpPr>
+          <p:cNvPr id="4" name="장식"/>
+          <p:cNvSpPr/>
+          <p:nvPr/>
+        </p:nvSpPr>
+        <p:spPr>
+          <a:xfrm>
+            <a:off x="4358505" y="4251960"/>
+            <a:ext cx="1005840" cy="1005840"/>
+          </a:xfrm>
+          <a:prstGeom prst="ellipse">
+            <a:avLst/>
+          </a:prstGeom>
+          <a:solidFill>
+            <a:srgbClr val="EBD6AD"/>
+          </a:solidFill>
+          <a:ln>
+            <a:noFill/>
+          </a:ln>
+        </p:spPr>
+        <p:txBody>
+          <a:bodyPr rtlCol="0" anchor="ctr"/>
+          <a:lstStyle/>
+          <a:p>
+            <a:pPr algn="ctr"/>
+          </a:p>
+        </p:txBody>
+      </p:sp>
+      <p:sp>
+        <p:nvSpPr>
+          <p:cNvPr id="5" name="라벨"/>
+          <p:cNvSpPr txBox="1"/>
+          <p:nvPr/>
+        </p:nvSpPr>
+        <p:spPr>
+          <a:xfrm>
+            <a:off x="6827349" y="2148840"/>
+            <a:ext cx="4632844" cy="274320"/>
           </a:xfrm>
           <a:prstGeom prst="rect">
             <a:avLst/>
           </a:prstGeom>
-        </p:spPr>
-      </p:pic>
+          <a:noFill/>
+        </p:spPr>
+        <p:txBody>
+          <a:bodyPr wrap="square" lIns="54864" rIns="54864" tIns="27432" bIns="27432" anchor="t">
+            <a:noAutofit/>
+          </a:bodyPr>
+          <a:lstStyle/>
+          <a:p>
+            <a:pPr algn="l">
+              <a:lnSpc>
+                <a:spcPct val="115000"/>
+              </a:lnSpc>
+            </a:pPr>
+            <a:r>
+              <a:rPr sz="1000" b="1" i="0" spc="250">
+                <a:solidFill>
+                  <a:srgbClr val="26231F"/>
+                </a:solidFill>
+              </a:rPr>
+              <a:t>FAMILY ALBUM</a:t>
+            </a:r>
+          </a:p>
+        </p:txBody>
+      </p:sp>
       <p:sp>
         <p:nvSpPr>
           <p:cNvPr id="2" name="Title 1"/>
@@ -3329,8 +3426,8 @@
         </p:nvSpPr>
         <p:spPr>
           <a:xfrm>
-            <a:off x="853418" y="2057400"/>
-            <a:ext cx="6095847" cy="1554480"/>
+            <a:off x="6827349" y="2606040"/>
+            <a:ext cx="4632844" cy="1188720"/>
           </a:xfrm>
         </p:spPr>
         <p:txBody>
@@ -3345,9 +3442,9 @@
               </a:lnSpc>
             </a:pPr>
             <a:r>
-              <a:rPr sz="3600" b="1" i="0">
-                <a:solidFill>
-                  <a:srgbClr val="715214"/>
+              <a:rPr sz="4000" b="1" i="0">
+                <a:solidFill>
+                  <a:srgbClr val="26231F"/>
                 </a:solidFill>
               </a:rPr>
               <a:t>우리 가족을 소개합니다</a:t>
@@ -3357,14 +3454,14 @@
       </p:sp>
       <p:sp>
         <p:nvSpPr>
-          <p:cNvPr id="4" name="한 줄 문구"/>
+          <p:cNvPr id="6" name="한 줄 문구"/>
           <p:cNvSpPr txBox="1"/>
           <p:nvPr/>
         </p:nvSpPr>
         <p:spPr>
           <a:xfrm>
-            <a:off x="853418" y="3749039"/>
-            <a:ext cx="6095847" cy="822960"/>
+            <a:off x="6827349" y="3886200"/>
+            <a:ext cx="4632844" cy="822960"/>
           </a:xfrm>
           <a:prstGeom prst="rect">
             <a:avLst/>
@@ -3383,9 +3480,9 @@
               </a:lnSpc>
             </a:pPr>
             <a:r>
-              <a:rPr sz="1700" b="0" i="1">
-                <a:solidFill>
-                  <a:srgbClr val="715214"/>
+              <a:rPr sz="1700" b="0" i="0">
+                <a:solidFill>
+                  <a:srgbClr val="26231F"/>
                 </a:solidFill>
               </a:rPr>
               <a:t>송편 빚다 말고 달 보러 나온 밤</a:t>
@@ -3395,14 +3492,14 @@
       </p:sp>
       <p:sp>
         <p:nvSpPr>
-          <p:cNvPr id="5" name="안내 문구"/>
+          <p:cNvPr id="7" name="안내 문구"/>
           <p:cNvSpPr txBox="1"/>
           <p:nvPr/>
         </p:nvSpPr>
         <p:spPr>
           <a:xfrm>
-            <a:off x="853418" y="4617720"/>
-            <a:ext cx="6095847" cy="914400"/>
+            <a:off x="6827349" y="4754880"/>
+            <a:ext cx="4632844" cy="914400"/>
           </a:xfrm>
           <a:prstGeom prst="rect">
             <a:avLst/>
@@ -3423,10 +3520,10 @@
             <a:r>
               <a:rPr sz="1400" b="0" i="0">
                 <a:solidFill>
-                  <a:srgbClr val="666666"/>
+                  <a:srgbClr val="26231F"/>
                 </a:solidFill>
               </a:rPr>
-              <a:t>아이와 함께 · 2027. 00. 00</a:t>
+              <a:t>아이와 함께 · 날짜 입력</a:t>
             </a:r>
           </a:p>
         </p:txBody>
@@ -3445,7 +3542,7 @@
     <p:bg>
       <p:bgPr>
         <a:solidFill>
-          <a:srgbClr val="F7E8C9"/>
+          <a:srgbClr val="FFFFFF"/>
         </a:solidFill>
         <a:effectLst/>
       </p:bgPr>
@@ -3465,20 +3562,86 @@
         </p:nvSpPr>
         <p:spPr>
           <a:xfrm>
-            <a:off x="274320" y="274320"/>
-            <a:ext cx="11643055" cy="6309360"/>
+            <a:off x="640080" y="566928"/>
+            <a:ext cx="64008" cy="868680"/>
+          </a:xfrm>
+          <a:prstGeom prst="roundRect">
+            <a:avLst>
+              <a:gd name="adj" fmla="val 50000"/>
+            </a:avLst>
+          </a:prstGeom>
+          <a:solidFill>
+            <a:srgbClr val="D8B879"/>
+          </a:solidFill>
+          <a:ln>
+            <a:noFill/>
+          </a:ln>
+        </p:spPr>
+        <p:txBody>
+          <a:bodyPr rtlCol="0" anchor="ctr"/>
+          <a:lstStyle/>
+          <a:p>
+            <a:pPr algn="ctr"/>
+          </a:p>
+        </p:txBody>
+      </p:sp>
+      <p:sp>
+        <p:nvSpPr>
+          <p:cNvPr id="4" name="상단 라벨"/>
+          <p:cNvSpPr txBox="1"/>
+          <p:nvPr/>
+        </p:nvSpPr>
+        <p:spPr>
+          <a:xfrm>
+            <a:off x="868680" y="274320"/>
+            <a:ext cx="5486400" cy="274320"/>
           </a:xfrm>
           <a:prstGeom prst="rect">
             <a:avLst/>
           </a:prstGeom>
+          <a:noFill/>
+        </p:spPr>
+        <p:txBody>
+          <a:bodyPr wrap="square" lIns="54864" rIns="54864" tIns="27432" bIns="27432" anchor="ctr">
+            <a:noAutofit/>
+          </a:bodyPr>
+          <a:lstStyle/>
+          <a:p>
+            <a:pPr algn="l">
+              <a:lnSpc>
+                <a:spcPct val="115000"/>
+              </a:lnSpc>
+            </a:pPr>
+            <a:r>
+              <a:rPr sz="900" b="1" i="0" spc="250">
+                <a:solidFill>
+                  <a:srgbClr val="8E8780"/>
+                </a:solidFill>
+              </a:rPr>
+              <a:t>FAMILY ALBUM</a:t>
+            </a:r>
+          </a:p>
+        </p:txBody>
+      </p:sp>
+      <p:sp>
+        <p:nvSpPr>
+          <p:cNvPr id="5" name="포인트"/>
+          <p:cNvSpPr/>
+          <p:nvPr/>
+        </p:nvSpPr>
+        <p:spPr>
+          <a:xfrm>
+            <a:off x="11167567" y="667512"/>
+            <a:ext cx="310896" cy="310896"/>
+          </a:xfrm>
+          <a:prstGeom prst="moon">
+            <a:avLst/>
+          </a:prstGeom>
           <a:solidFill>
-            <a:srgbClr val="FFFFFF"/>
+            <a:srgbClr val="EBD6AD"/>
           </a:solidFill>
-          <a:ln w="25400">
-            <a:solidFill>
-              <a:srgbClr val="C79123"/>
-            </a:solidFill>
-            <a:prstDash val="dash"/>
+          <a:ln>
+            <a:noFill/>
           </a:ln>
         </p:spPr>
         <p:txBody>
@@ -3501,8 +3664,8 @@
         </p:nvSpPr>
         <p:spPr>
           <a:xfrm>
-            <a:off x="777240" y="548640"/>
-            <a:ext cx="9357055" cy="822960"/>
+            <a:off x="868680" y="566928"/>
+            <a:ext cx="9448495" cy="868680"/>
           </a:xfrm>
         </p:spPr>
         <p:txBody>
@@ -3519,7 +3682,7 @@
             <a:r>
               <a:rPr sz="3000" b="1" i="0">
                 <a:solidFill>
-                  <a:srgbClr val="715214"/>
+                  <a:srgbClr val="26231F"/>
                 </a:solidFill>
               </a:rPr>
               <a:t>가족 구성원</a:t>
@@ -3529,25 +3692,23 @@
       </p:sp>
       <p:sp>
         <p:nvSpPr>
-          <p:cNvPr id="4" name="사진 자리"/>
+          <p:cNvPr id="6" name="사진 자리"/>
           <p:cNvSpPr/>
           <p:nvPr/>
         </p:nvSpPr>
         <p:spPr>
           <a:xfrm>
-            <a:off x="914399" y="1554480"/>
-            <a:ext cx="2213533" cy="2213533"/>
+            <a:off x="777239" y="1783080"/>
+            <a:ext cx="2282113" cy="2282113"/>
           </a:xfrm>
           <a:prstGeom prst="ellipse">
             <a:avLst/>
           </a:prstGeom>
           <a:solidFill>
-            <a:srgbClr val="F7E8C9"/>
+            <a:srgbClr val="F6EBD5"/>
           </a:solidFill>
           <a:ln w="19050">
-            <a:solidFill>
-              <a:srgbClr val="C79123"/>
-            </a:solidFill>
+            <a:noFill/>
             <a:prstDash val="dash"/>
           </a:ln>
         </p:spPr>
@@ -3565,7 +3726,7 @@
             <a:r>
               <a:rPr sz="1200" b="0" i="0">
                 <a:solidFill>
-                  <a:srgbClr val="715214"/>
+                  <a:srgbClr val="8E8780"/>
                 </a:solidFill>
               </a:rPr>
               <a:t>사진</a:t>
@@ -3575,14 +3736,14 @@
       </p:sp>
       <p:sp>
         <p:nvSpPr>
-          <p:cNvPr id="5" name="TextBox 4"/>
+          <p:cNvPr id="7" name="TextBox 6"/>
           <p:cNvSpPr txBox="1"/>
           <p:nvPr/>
         </p:nvSpPr>
         <p:spPr>
           <a:xfrm>
-            <a:off x="777240" y="3859453"/>
-            <a:ext cx="2487853" cy="411480"/>
+            <a:off x="640080" y="4156633"/>
+            <a:ext cx="2556433" cy="411480"/>
           </a:xfrm>
           <a:prstGeom prst="rect">
             <a:avLst/>
@@ -3603,7 +3764,7 @@
             <a:r>
               <a:rPr sz="1600" b="1" i="0">
                 <a:solidFill>
-                  <a:srgbClr val="715214"/>
+                  <a:srgbClr val="493E27"/>
                 </a:solidFill>
               </a:rPr>
               <a:t>아빠</a:t>
@@ -3613,14 +3774,14 @@
       </p:sp>
       <p:sp>
         <p:nvSpPr>
-          <p:cNvPr id="6" name="TextBox 5"/>
+          <p:cNvPr id="8" name="TextBox 7"/>
           <p:cNvSpPr txBox="1"/>
           <p:nvPr/>
         </p:nvSpPr>
         <p:spPr>
           <a:xfrm>
-            <a:off x="868680" y="4316653"/>
-            <a:ext cx="2304973" cy="1901266"/>
+            <a:off x="731519" y="4613833"/>
+            <a:ext cx="2373553" cy="1741246"/>
           </a:xfrm>
           <a:prstGeom prst="rect">
             <a:avLst/>
@@ -3681,25 +3842,23 @@
       </p:sp>
       <p:sp>
         <p:nvSpPr>
-          <p:cNvPr id="7" name="사진 자리"/>
+          <p:cNvPr id="9" name="사진 자리"/>
           <p:cNvSpPr/>
           <p:nvPr/>
         </p:nvSpPr>
         <p:spPr>
           <a:xfrm>
-            <a:off x="3630853" y="1554480"/>
-            <a:ext cx="2213533" cy="2213533"/>
+            <a:off x="3562273" y="1783080"/>
+            <a:ext cx="2282113" cy="2282113"/>
           </a:xfrm>
           <a:prstGeom prst="ellipse">
             <a:avLst/>
           </a:prstGeom>
           <a:solidFill>
-            <a:srgbClr val="F7E8C9"/>
+            <a:srgbClr val="F6EBD5"/>
           </a:solidFill>
           <a:ln w="19050">
-            <a:solidFill>
-              <a:srgbClr val="C79123"/>
-            </a:solidFill>
+            <a:noFill/>
             <a:prstDash val="dash"/>
           </a:ln>
         </p:spPr>
@@ -3717,7 +3876,7 @@
             <a:r>
               <a:rPr sz="1200" b="0" i="0">
                 <a:solidFill>
-                  <a:srgbClr val="715214"/>
+                  <a:srgbClr val="8E8780"/>
                 </a:solidFill>
               </a:rPr>
               <a:t>사진</a:t>
@@ -3727,14 +3886,14 @@
       </p:sp>
       <p:sp>
         <p:nvSpPr>
-          <p:cNvPr id="8" name="TextBox 7"/>
+          <p:cNvPr id="10" name="TextBox 9"/>
           <p:cNvSpPr txBox="1"/>
           <p:nvPr/>
         </p:nvSpPr>
         <p:spPr>
           <a:xfrm>
-            <a:off x="3493693" y="3859453"/>
-            <a:ext cx="2487853" cy="411480"/>
+            <a:off x="3425113" y="4156633"/>
+            <a:ext cx="2556433" cy="411480"/>
           </a:xfrm>
           <a:prstGeom prst="rect">
             <a:avLst/>
@@ -3755,7 +3914,7 @@
             <a:r>
               <a:rPr sz="1600" b="1" i="0">
                 <a:solidFill>
-                  <a:srgbClr val="715214"/>
+                  <a:srgbClr val="493E27"/>
                 </a:solidFill>
               </a:rPr>
               <a:t>엄마</a:t>
@@ -3765,14 +3924,14 @@
       </p:sp>
       <p:sp>
         <p:nvSpPr>
-          <p:cNvPr id="9" name="TextBox 8"/>
+          <p:cNvPr id="11" name="TextBox 10"/>
           <p:cNvSpPr txBox="1"/>
           <p:nvPr/>
         </p:nvSpPr>
         <p:spPr>
           <a:xfrm>
-            <a:off x="3585133" y="4316653"/>
-            <a:ext cx="2304973" cy="1901266"/>
+            <a:off x="3516553" y="4613833"/>
+            <a:ext cx="2373553" cy="1741246"/>
           </a:xfrm>
           <a:prstGeom prst="rect">
             <a:avLst/>
@@ -3833,25 +3992,23 @@
       </p:sp>
       <p:sp>
         <p:nvSpPr>
-          <p:cNvPr id="10" name="사진 자리"/>
+          <p:cNvPr id="12" name="사진 자리"/>
           <p:cNvSpPr/>
           <p:nvPr/>
         </p:nvSpPr>
         <p:spPr>
           <a:xfrm>
-            <a:off x="6347307" y="1554480"/>
-            <a:ext cx="2213533" cy="2213533"/>
+            <a:off x="6347307" y="1783080"/>
+            <a:ext cx="2282113" cy="2282113"/>
           </a:xfrm>
           <a:prstGeom prst="ellipse">
             <a:avLst/>
           </a:prstGeom>
           <a:solidFill>
-            <a:srgbClr val="F7E8C9"/>
+            <a:srgbClr val="F6EBD5"/>
           </a:solidFill>
           <a:ln w="19050">
-            <a:solidFill>
-              <a:srgbClr val="C79123"/>
-            </a:solidFill>
+            <a:noFill/>
             <a:prstDash val="dash"/>
           </a:ln>
         </p:spPr>
@@ -3869,7 +4026,7 @@
             <a:r>
               <a:rPr sz="1200" b="0" i="0">
                 <a:solidFill>
-                  <a:srgbClr val="715214"/>
+                  <a:srgbClr val="8E8780"/>
                 </a:solidFill>
               </a:rPr>
               <a:t>사진</a:t>
@@ -3879,14 +4036,14 @@
       </p:sp>
       <p:sp>
         <p:nvSpPr>
-          <p:cNvPr id="11" name="TextBox 10"/>
+          <p:cNvPr id="13" name="TextBox 12"/>
           <p:cNvSpPr txBox="1"/>
           <p:nvPr/>
         </p:nvSpPr>
         <p:spPr>
           <a:xfrm>
-            <a:off x="6210147" y="3859453"/>
-            <a:ext cx="2487853" cy="411480"/>
+            <a:off x="6210147" y="4156633"/>
+            <a:ext cx="2556433" cy="411480"/>
           </a:xfrm>
           <a:prstGeom prst="rect">
             <a:avLst/>
@@ -3907,7 +4064,7 @@
             <a:r>
               <a:rPr sz="1600" b="1" i="0">
                 <a:solidFill>
-                  <a:srgbClr val="715214"/>
+                  <a:srgbClr val="493E27"/>
                 </a:solidFill>
               </a:rPr>
               <a:t>첫째</a:t>
@@ -3917,14 +4074,14 @@
       </p:sp>
       <p:sp>
         <p:nvSpPr>
-          <p:cNvPr id="12" name="TextBox 11"/>
+          <p:cNvPr id="14" name="TextBox 13"/>
           <p:cNvSpPr txBox="1"/>
           <p:nvPr/>
         </p:nvSpPr>
         <p:spPr>
           <a:xfrm>
-            <a:off x="6301587" y="4316653"/>
-            <a:ext cx="2304973" cy="1901266"/>
+            <a:off x="6301587" y="4613833"/>
+            <a:ext cx="2373553" cy="1741246"/>
           </a:xfrm>
           <a:prstGeom prst="rect">
             <a:avLst/>
@@ -3985,25 +4142,23 @@
       </p:sp>
       <p:sp>
         <p:nvSpPr>
-          <p:cNvPr id="13" name="사진 자리"/>
+          <p:cNvPr id="15" name="사진 자리"/>
           <p:cNvSpPr/>
           <p:nvPr/>
         </p:nvSpPr>
         <p:spPr>
           <a:xfrm>
-            <a:off x="9063761" y="1554480"/>
-            <a:ext cx="2213533" cy="2213533"/>
+            <a:off x="9132341" y="1783080"/>
+            <a:ext cx="2282113" cy="2282113"/>
           </a:xfrm>
           <a:prstGeom prst="ellipse">
             <a:avLst/>
           </a:prstGeom>
           <a:solidFill>
-            <a:srgbClr val="F7E8C9"/>
+            <a:srgbClr val="F6EBD5"/>
           </a:solidFill>
           <a:ln w="19050">
-            <a:solidFill>
-              <a:srgbClr val="C79123"/>
-            </a:solidFill>
+            <a:noFill/>
             <a:prstDash val="dash"/>
           </a:ln>
         </p:spPr>
@@ -4021,7 +4176,7 @@
             <a:r>
               <a:rPr sz="1200" b="0" i="0">
                 <a:solidFill>
-                  <a:srgbClr val="715214"/>
+                  <a:srgbClr val="8E8780"/>
                 </a:solidFill>
               </a:rPr>
               <a:t>사진</a:t>
@@ -4031,14 +4186,14 @@
       </p:sp>
       <p:sp>
         <p:nvSpPr>
-          <p:cNvPr id="14" name="TextBox 13"/>
+          <p:cNvPr id="16" name="TextBox 15"/>
           <p:cNvSpPr txBox="1"/>
           <p:nvPr/>
         </p:nvSpPr>
         <p:spPr>
           <a:xfrm>
-            <a:off x="8926601" y="3859453"/>
-            <a:ext cx="2487853" cy="411480"/>
+            <a:off x="8995181" y="4156633"/>
+            <a:ext cx="2556433" cy="411480"/>
           </a:xfrm>
           <a:prstGeom prst="rect">
             <a:avLst/>
@@ -4059,7 +4214,7 @@
             <a:r>
               <a:rPr sz="1600" b="1" i="0">
                 <a:solidFill>
-                  <a:srgbClr val="715214"/>
+                  <a:srgbClr val="493E27"/>
                 </a:solidFill>
               </a:rPr>
               <a:t>둘째</a:t>
@@ -4069,14 +4224,14 @@
       </p:sp>
       <p:sp>
         <p:nvSpPr>
-          <p:cNvPr id="15" name="TextBox 14"/>
+          <p:cNvPr id="17" name="TextBox 16"/>
           <p:cNvSpPr txBox="1"/>
           <p:nvPr/>
         </p:nvSpPr>
         <p:spPr>
           <a:xfrm>
-            <a:off x="9018041" y="4316653"/>
-            <a:ext cx="2304973" cy="1901266"/>
+            <a:off x="9086621" y="4613833"/>
+            <a:ext cx="2373553" cy="1741246"/>
           </a:xfrm>
           <a:prstGeom prst="rect">
             <a:avLst/>
@@ -4149,7 +4304,7 @@
     <p:bg>
       <p:bgPr>
         <a:solidFill>
-          <a:srgbClr val="F7E8C9"/>
+          <a:srgbClr val="FFFFFF"/>
         </a:solidFill>
         <a:effectLst/>
       </p:bgPr>
@@ -4169,20 +4324,86 @@
         </p:nvSpPr>
         <p:spPr>
           <a:xfrm>
-            <a:off x="274320" y="274320"/>
-            <a:ext cx="11643055" cy="6309360"/>
+            <a:off x="640080" y="566928"/>
+            <a:ext cx="64008" cy="868680"/>
+          </a:xfrm>
+          <a:prstGeom prst="roundRect">
+            <a:avLst>
+              <a:gd name="adj" fmla="val 50000"/>
+            </a:avLst>
+          </a:prstGeom>
+          <a:solidFill>
+            <a:srgbClr val="D8B879"/>
+          </a:solidFill>
+          <a:ln>
+            <a:noFill/>
+          </a:ln>
+        </p:spPr>
+        <p:txBody>
+          <a:bodyPr rtlCol="0" anchor="ctr"/>
+          <a:lstStyle/>
+          <a:p>
+            <a:pPr algn="ctr"/>
+          </a:p>
+        </p:txBody>
+      </p:sp>
+      <p:sp>
+        <p:nvSpPr>
+          <p:cNvPr id="4" name="상단 라벨"/>
+          <p:cNvSpPr txBox="1"/>
+          <p:nvPr/>
+        </p:nvSpPr>
+        <p:spPr>
+          <a:xfrm>
+            <a:off x="868680" y="274320"/>
+            <a:ext cx="5486400" cy="274320"/>
           </a:xfrm>
           <a:prstGeom prst="rect">
             <a:avLst/>
           </a:prstGeom>
+          <a:noFill/>
+        </p:spPr>
+        <p:txBody>
+          <a:bodyPr wrap="square" lIns="54864" rIns="54864" tIns="27432" bIns="27432" anchor="ctr">
+            <a:noAutofit/>
+          </a:bodyPr>
+          <a:lstStyle/>
+          <a:p>
+            <a:pPr algn="l">
+              <a:lnSpc>
+                <a:spcPct val="115000"/>
+              </a:lnSpc>
+            </a:pPr>
+            <a:r>
+              <a:rPr sz="900" b="1" i="0" spc="250">
+                <a:solidFill>
+                  <a:srgbClr val="8E8780"/>
+                </a:solidFill>
+              </a:rPr>
+              <a:t>FAMILY ALBUM</a:t>
+            </a:r>
+          </a:p>
+        </p:txBody>
+      </p:sp>
+      <p:sp>
+        <p:nvSpPr>
+          <p:cNvPr id="5" name="포인트"/>
+          <p:cNvSpPr/>
+          <p:nvPr/>
+        </p:nvSpPr>
+        <p:spPr>
+          <a:xfrm>
+            <a:off x="11167567" y="667512"/>
+            <a:ext cx="310896" cy="310896"/>
+          </a:xfrm>
+          <a:prstGeom prst="moon">
+            <a:avLst/>
+          </a:prstGeom>
           <a:solidFill>
-            <a:srgbClr val="FFFFFF"/>
+            <a:srgbClr val="EBD6AD"/>
           </a:solidFill>
-          <a:ln w="25400">
-            <a:solidFill>
-              <a:srgbClr val="C79123"/>
-            </a:solidFill>
-            <a:prstDash val="dash"/>
+          <a:ln>
+            <a:noFill/>
           </a:ln>
         </p:spPr>
         <p:txBody>
@@ -4205,8 +4426,8 @@
         </p:nvSpPr>
         <p:spPr>
           <a:xfrm>
-            <a:off x="777240" y="548640"/>
-            <a:ext cx="9357055" cy="822960"/>
+            <a:off x="868680" y="566928"/>
+            <a:ext cx="9448495" cy="868680"/>
           </a:xfrm>
         </p:spPr>
         <p:txBody>
@@ -4223,7 +4444,7 @@
             <a:r>
               <a:rPr sz="3000" b="1" i="0">
                 <a:solidFill>
-                  <a:srgbClr val="715214"/>
+                  <a:srgbClr val="26231F"/>
                 </a:solidFill>
               </a:rPr>
               <a:t>우리 가족 이야기</a:t>
@@ -4233,20 +4454,20 @@
       </p:sp>
       <p:sp>
         <p:nvSpPr>
-          <p:cNvPr id="4" name="타임라인 선"/>
+          <p:cNvPr id="6" name="타임라인 선"/>
           <p:cNvSpPr/>
           <p:nvPr/>
         </p:nvSpPr>
         <p:spPr>
           <a:xfrm>
-            <a:off x="777240" y="3291840"/>
-            <a:ext cx="10637215" cy="54864"/>
+            <a:off x="640080" y="3520440"/>
+            <a:ext cx="10911535" cy="54864"/>
           </a:xfrm>
           <a:prstGeom prst="rect">
             <a:avLst/>
           </a:prstGeom>
           <a:solidFill>
-            <a:srgbClr val="F7E8C9"/>
+            <a:srgbClr val="F6EBD5"/>
           </a:solidFill>
           <a:ln>
             <a:noFill/>
@@ -4262,20 +4483,20 @@
       </p:sp>
       <p:sp>
         <p:nvSpPr>
-          <p:cNvPr id="5" name="때 1"/>
+          <p:cNvPr id="7" name="때 1"/>
           <p:cNvSpPr/>
           <p:nvPr/>
         </p:nvSpPr>
         <p:spPr>
           <a:xfrm>
-            <a:off x="1905723" y="3108960"/>
+            <a:off x="1802853" y="3337560"/>
             <a:ext cx="402336" cy="402336"/>
           </a:xfrm>
           <a:prstGeom prst="ellipse">
             <a:avLst/>
           </a:prstGeom>
           <a:solidFill>
-            <a:srgbClr val="C79123"/>
+            <a:srgbClr val="D8B879"/>
           </a:solidFill>
           <a:ln w="38100">
             <a:solidFill>
@@ -4293,14 +4514,14 @@
       </p:sp>
       <p:sp>
         <p:nvSpPr>
-          <p:cNvPr id="6" name="TextBox 5"/>
+          <p:cNvPr id="8" name="TextBox 7"/>
           <p:cNvSpPr txBox="1"/>
           <p:nvPr/>
         </p:nvSpPr>
         <p:spPr>
           <a:xfrm>
-            <a:off x="822959" y="2468880"/>
-            <a:ext cx="2567863" cy="457200"/>
+            <a:off x="685800" y="2697480"/>
+            <a:ext cx="2636443" cy="457200"/>
           </a:xfrm>
           <a:prstGeom prst="rect">
             <a:avLst/>
@@ -4321,7 +4542,7 @@
             <a:r>
               <a:rPr sz="1600" b="1" i="0">
                 <a:solidFill>
-                  <a:srgbClr val="C79123"/>
+                  <a:srgbClr val="D8B879"/>
                 </a:solidFill>
               </a:rPr>
               <a:t>가족이 된 날</a:t>
@@ -4331,14 +4552,14 @@
       </p:sp>
       <p:sp>
         <p:nvSpPr>
-          <p:cNvPr id="7" name="TextBox 6"/>
+          <p:cNvPr id="9" name="TextBox 8"/>
           <p:cNvSpPr txBox="1"/>
           <p:nvPr/>
         </p:nvSpPr>
         <p:spPr>
           <a:xfrm>
-            <a:off x="868679" y="3657600"/>
-            <a:ext cx="2476423" cy="457200"/>
+            <a:off x="731519" y="3886200"/>
+            <a:ext cx="2545003" cy="457200"/>
           </a:xfrm>
           <a:prstGeom prst="rect">
             <a:avLst/>
@@ -4359,7 +4580,7 @@
             <a:r>
               <a:rPr sz="1800" b="1" i="0">
                 <a:solidFill>
-                  <a:srgbClr val="715214"/>
+                  <a:srgbClr val="493E27"/>
                 </a:solidFill>
               </a:rPr>
               <a:t>우리의 시작</a:t>
@@ -4369,14 +4590,14 @@
       </p:sp>
       <p:sp>
         <p:nvSpPr>
-          <p:cNvPr id="8" name="TextBox 7"/>
+          <p:cNvPr id="10" name="TextBox 9"/>
           <p:cNvSpPr txBox="1"/>
           <p:nvPr/>
         </p:nvSpPr>
         <p:spPr>
           <a:xfrm>
-            <a:off x="868679" y="4160520"/>
-            <a:ext cx="2476423" cy="1645920"/>
+            <a:off x="731519" y="4389120"/>
+            <a:ext cx="2545003" cy="1645920"/>
           </a:xfrm>
           <a:prstGeom prst="rect">
             <a:avLst/>
@@ -4397,7 +4618,7 @@
             <a:r>
               <a:rPr sz="1500" b="0" i="0">
                 <a:solidFill>
-                  <a:srgbClr val="2B2B2B"/>
+                  <a:srgbClr val="26231F"/>
                 </a:solidFill>
               </a:rPr>
               <a:t>처음 만난 날의 이야기</a:t>
@@ -4407,20 +4628,20 @@
       </p:sp>
       <p:sp>
         <p:nvSpPr>
-          <p:cNvPr id="9" name="때 2"/>
+          <p:cNvPr id="11" name="때 2"/>
           <p:cNvSpPr/>
           <p:nvPr/>
         </p:nvSpPr>
         <p:spPr>
           <a:xfrm>
-            <a:off x="4565027" y="3108960"/>
+            <a:off x="4530737" y="3337560"/>
             <a:ext cx="402336" cy="402336"/>
           </a:xfrm>
           <a:prstGeom prst="ellipse">
             <a:avLst/>
           </a:prstGeom>
           <a:solidFill>
-            <a:srgbClr val="C79123"/>
+            <a:srgbClr val="D8B879"/>
           </a:solidFill>
           <a:ln w="38100">
             <a:solidFill>
@@ -4438,14 +4659,14 @@
       </p:sp>
       <p:sp>
         <p:nvSpPr>
-          <p:cNvPr id="10" name="TextBox 9"/>
+          <p:cNvPr id="12" name="TextBox 11"/>
           <p:cNvSpPr txBox="1"/>
           <p:nvPr/>
         </p:nvSpPr>
         <p:spPr>
           <a:xfrm>
-            <a:off x="3482263" y="2468880"/>
-            <a:ext cx="2567863" cy="457200"/>
+            <a:off x="3413683" y="2697480"/>
+            <a:ext cx="2636443" cy="457200"/>
           </a:xfrm>
           <a:prstGeom prst="rect">
             <a:avLst/>
@@ -4466,7 +4687,7 @@
             <a:r>
               <a:rPr sz="1600" b="1" i="0">
                 <a:solidFill>
-                  <a:srgbClr val="C79123"/>
+                  <a:srgbClr val="D8B879"/>
                 </a:solidFill>
               </a:rPr>
               <a:t>아이가 태어난 날</a:t>
@@ -4476,14 +4697,14 @@
       </p:sp>
       <p:sp>
         <p:nvSpPr>
-          <p:cNvPr id="11" name="TextBox 10"/>
+          <p:cNvPr id="13" name="TextBox 12"/>
           <p:cNvSpPr txBox="1"/>
           <p:nvPr/>
         </p:nvSpPr>
         <p:spPr>
           <a:xfrm>
-            <a:off x="3527983" y="3657600"/>
-            <a:ext cx="2476423" cy="457200"/>
+            <a:off x="3459403" y="3886200"/>
+            <a:ext cx="2545003" cy="457200"/>
           </a:xfrm>
           <a:prstGeom prst="rect">
             <a:avLst/>
@@ -4504,7 +4725,7 @@
             <a:r>
               <a:rPr sz="1800" b="1" i="0">
                 <a:solidFill>
-                  <a:srgbClr val="715214"/>
+                  <a:srgbClr val="493E27"/>
                 </a:solidFill>
               </a:rPr>
               <a:t>새 식구</a:t>
@@ -4514,14 +4735,14 @@
       </p:sp>
       <p:sp>
         <p:nvSpPr>
-          <p:cNvPr id="12" name="TextBox 11"/>
+          <p:cNvPr id="14" name="TextBox 13"/>
           <p:cNvSpPr txBox="1"/>
           <p:nvPr/>
         </p:nvSpPr>
         <p:spPr>
           <a:xfrm>
-            <a:off x="3527983" y="4160520"/>
-            <a:ext cx="2476423" cy="1645920"/>
+            <a:off x="3459403" y="4389120"/>
+            <a:ext cx="2545003" cy="1645920"/>
           </a:xfrm>
           <a:prstGeom prst="rect">
             <a:avLst/>
@@ -4542,7 +4763,7 @@
             <a:r>
               <a:rPr sz="1500" b="0" i="0">
                 <a:solidFill>
-                  <a:srgbClr val="2B2B2B"/>
+                  <a:srgbClr val="26231F"/>
                 </a:solidFill>
               </a:rPr>
               <a:t>그날의 기억을 적어요</a:t>
@@ -4552,20 +4773,20 @@
       </p:sp>
       <p:sp>
         <p:nvSpPr>
-          <p:cNvPr id="13" name="때 3"/>
+          <p:cNvPr id="15" name="때 3"/>
           <p:cNvSpPr/>
           <p:nvPr/>
         </p:nvSpPr>
         <p:spPr>
           <a:xfrm>
-            <a:off x="7224331" y="3108960"/>
+            <a:off x="7258621" y="3337560"/>
             <a:ext cx="402336" cy="402336"/>
           </a:xfrm>
           <a:prstGeom prst="ellipse">
             <a:avLst/>
           </a:prstGeom>
           <a:solidFill>
-            <a:srgbClr val="C79123"/>
+            <a:srgbClr val="D8B879"/>
           </a:solidFill>
           <a:ln w="38100">
             <a:solidFill>
@@ -4583,14 +4804,14 @@
       </p:sp>
       <p:sp>
         <p:nvSpPr>
-          <p:cNvPr id="14" name="TextBox 13"/>
+          <p:cNvPr id="16" name="TextBox 15"/>
           <p:cNvSpPr txBox="1"/>
           <p:nvPr/>
         </p:nvSpPr>
         <p:spPr>
           <a:xfrm>
-            <a:off x="6141567" y="2468880"/>
-            <a:ext cx="2567863" cy="457200"/>
+            <a:off x="6141567" y="2697480"/>
+            <a:ext cx="2636443" cy="457200"/>
           </a:xfrm>
           <a:prstGeom prst="rect">
             <a:avLst/>
@@ -4611,7 +4832,7 @@
             <a:r>
               <a:rPr sz="1600" b="1" i="0">
                 <a:solidFill>
-                  <a:srgbClr val="C79123"/>
+                  <a:srgbClr val="D8B879"/>
                 </a:solidFill>
               </a:rPr>
               <a:t>첫 가족 여행</a:t>
@@ -4621,14 +4842,14 @@
       </p:sp>
       <p:sp>
         <p:nvSpPr>
-          <p:cNvPr id="15" name="TextBox 14"/>
+          <p:cNvPr id="17" name="TextBox 16"/>
           <p:cNvSpPr txBox="1"/>
           <p:nvPr/>
         </p:nvSpPr>
         <p:spPr>
           <a:xfrm>
-            <a:off x="6187287" y="3657600"/>
-            <a:ext cx="2476423" cy="457200"/>
+            <a:off x="6187287" y="3886200"/>
+            <a:ext cx="2545003" cy="457200"/>
           </a:xfrm>
           <a:prstGeom prst="rect">
             <a:avLst/>
@@ -4649,7 +4870,7 @@
             <a:r>
               <a:rPr sz="1800" b="1" i="0">
                 <a:solidFill>
-                  <a:srgbClr val="715214"/>
+                  <a:srgbClr val="493E27"/>
                 </a:solidFill>
               </a:rPr>
               <a:t>함께 떠난 길</a:t>
@@ -4659,14 +4880,14 @@
       </p:sp>
       <p:sp>
         <p:nvSpPr>
-          <p:cNvPr id="16" name="TextBox 15"/>
+          <p:cNvPr id="18" name="TextBox 17"/>
           <p:cNvSpPr txBox="1"/>
           <p:nvPr/>
         </p:nvSpPr>
         <p:spPr>
           <a:xfrm>
-            <a:off x="6187287" y="4160520"/>
-            <a:ext cx="2476423" cy="1645920"/>
+            <a:off x="6187287" y="4389120"/>
+            <a:ext cx="2545003" cy="1645920"/>
           </a:xfrm>
           <a:prstGeom prst="rect">
             <a:avLst/>
@@ -4687,7 +4908,7 @@
             <a:r>
               <a:rPr sz="1500" b="0" i="0">
                 <a:solidFill>
-                  <a:srgbClr val="2B2B2B"/>
+                  <a:srgbClr val="26231F"/>
                 </a:solidFill>
               </a:rPr>
               <a:t>가장 웃었던 순간</a:t>
@@ -4697,20 +4918,20 @@
       </p:sp>
       <p:sp>
         <p:nvSpPr>
-          <p:cNvPr id="17" name="때 4"/>
+          <p:cNvPr id="19" name="때 4"/>
           <p:cNvSpPr/>
           <p:nvPr/>
         </p:nvSpPr>
         <p:spPr>
           <a:xfrm>
-            <a:off x="9883635" y="3108960"/>
+            <a:off x="9986505" y="3337560"/>
             <a:ext cx="402336" cy="402336"/>
           </a:xfrm>
           <a:prstGeom prst="ellipse">
             <a:avLst/>
           </a:prstGeom>
           <a:solidFill>
-            <a:srgbClr val="C79123"/>
+            <a:srgbClr val="D8B879"/>
           </a:solidFill>
           <a:ln w="38100">
             <a:solidFill>
@@ -4728,14 +4949,14 @@
       </p:sp>
       <p:sp>
         <p:nvSpPr>
-          <p:cNvPr id="18" name="TextBox 17"/>
+          <p:cNvPr id="20" name="TextBox 19"/>
           <p:cNvSpPr txBox="1"/>
           <p:nvPr/>
         </p:nvSpPr>
         <p:spPr>
           <a:xfrm>
-            <a:off x="8800871" y="2468880"/>
-            <a:ext cx="2567863" cy="457200"/>
+            <a:off x="8869451" y="2697480"/>
+            <a:ext cx="2636443" cy="457200"/>
           </a:xfrm>
           <a:prstGeom prst="rect">
             <a:avLst/>
@@ -4756,7 +4977,7 @@
             <a:r>
               <a:rPr sz="1600" b="1" i="0">
                 <a:solidFill>
-                  <a:srgbClr val="C79123"/>
+                  <a:srgbClr val="D8B879"/>
                 </a:solidFill>
               </a:rPr>
               <a:t>지금</a:t>
@@ -4766,14 +4987,14 @@
       </p:sp>
       <p:sp>
         <p:nvSpPr>
-          <p:cNvPr id="19" name="TextBox 18"/>
+          <p:cNvPr id="21" name="TextBox 20"/>
           <p:cNvSpPr txBox="1"/>
           <p:nvPr/>
         </p:nvSpPr>
         <p:spPr>
           <a:xfrm>
-            <a:off x="8846591" y="3657600"/>
-            <a:ext cx="2476423" cy="457200"/>
+            <a:off x="8915171" y="3886200"/>
+            <a:ext cx="2545003" cy="457200"/>
           </a:xfrm>
           <a:prstGeom prst="rect">
             <a:avLst/>
@@ -4794,7 +5015,7 @@
             <a:r>
               <a:rPr sz="1800" b="1" i="0">
                 <a:solidFill>
-                  <a:srgbClr val="715214"/>
+                  <a:srgbClr val="493E27"/>
                 </a:solidFill>
               </a:rPr>
               <a:t>오늘의 우리</a:t>
@@ -4804,14 +5025,14 @@
       </p:sp>
       <p:sp>
         <p:nvSpPr>
-          <p:cNvPr id="20" name="TextBox 19"/>
+          <p:cNvPr id="22" name="TextBox 21"/>
           <p:cNvSpPr txBox="1"/>
           <p:nvPr/>
         </p:nvSpPr>
         <p:spPr>
           <a:xfrm>
-            <a:off x="8846591" y="4160520"/>
-            <a:ext cx="2476423" cy="1645920"/>
+            <a:off x="8915171" y="4389120"/>
+            <a:ext cx="2545003" cy="1645920"/>
           </a:xfrm>
           <a:prstGeom prst="rect">
             <a:avLst/>
@@ -4832,7 +5053,7 @@
             <a:r>
               <a:rPr sz="1500" b="0" i="0">
                 <a:solidFill>
-                  <a:srgbClr val="2B2B2B"/>
+                  <a:srgbClr val="26231F"/>
                 </a:solidFill>
               </a:rPr>
               <a:t>요즘 우리 이야기</a:t>
@@ -4854,7 +5075,7 @@
     <p:bg>
       <p:bgPr>
         <a:solidFill>
-          <a:srgbClr val="F7E8C9"/>
+          <a:srgbClr val="FFFFFF"/>
         </a:solidFill>
         <a:effectLst/>
       </p:bgPr>
@@ -4874,20 +5095,86 @@
         </p:nvSpPr>
         <p:spPr>
           <a:xfrm>
-            <a:off x="274320" y="274320"/>
-            <a:ext cx="11643055" cy="6309360"/>
+            <a:off x="640080" y="566928"/>
+            <a:ext cx="64008" cy="868680"/>
+          </a:xfrm>
+          <a:prstGeom prst="roundRect">
+            <a:avLst>
+              <a:gd name="adj" fmla="val 50000"/>
+            </a:avLst>
+          </a:prstGeom>
+          <a:solidFill>
+            <a:srgbClr val="D8B879"/>
+          </a:solidFill>
+          <a:ln>
+            <a:noFill/>
+          </a:ln>
+        </p:spPr>
+        <p:txBody>
+          <a:bodyPr rtlCol="0" anchor="ctr"/>
+          <a:lstStyle/>
+          <a:p>
+            <a:pPr algn="ctr"/>
+          </a:p>
+        </p:txBody>
+      </p:sp>
+      <p:sp>
+        <p:nvSpPr>
+          <p:cNvPr id="4" name="상단 라벨"/>
+          <p:cNvSpPr txBox="1"/>
+          <p:nvPr/>
+        </p:nvSpPr>
+        <p:spPr>
+          <a:xfrm>
+            <a:off x="868680" y="274320"/>
+            <a:ext cx="5486400" cy="274320"/>
           </a:xfrm>
           <a:prstGeom prst="rect">
             <a:avLst/>
           </a:prstGeom>
+          <a:noFill/>
+        </p:spPr>
+        <p:txBody>
+          <a:bodyPr wrap="square" lIns="54864" rIns="54864" tIns="27432" bIns="27432" anchor="ctr">
+            <a:noAutofit/>
+          </a:bodyPr>
+          <a:lstStyle/>
+          <a:p>
+            <a:pPr algn="l">
+              <a:lnSpc>
+                <a:spcPct val="115000"/>
+              </a:lnSpc>
+            </a:pPr>
+            <a:r>
+              <a:rPr sz="900" b="1" i="0" spc="250">
+                <a:solidFill>
+                  <a:srgbClr val="8E8780"/>
+                </a:solidFill>
+              </a:rPr>
+              <a:t>FAMILY ALBUM</a:t>
+            </a:r>
+          </a:p>
+        </p:txBody>
+      </p:sp>
+      <p:sp>
+        <p:nvSpPr>
+          <p:cNvPr id="5" name="포인트"/>
+          <p:cNvSpPr/>
+          <p:nvPr/>
+        </p:nvSpPr>
+        <p:spPr>
+          <a:xfrm>
+            <a:off x="11167567" y="667512"/>
+            <a:ext cx="310896" cy="310896"/>
+          </a:xfrm>
+          <a:prstGeom prst="moon">
+            <a:avLst/>
+          </a:prstGeom>
           <a:solidFill>
-            <a:srgbClr val="FFFFFF"/>
+            <a:srgbClr val="EBD6AD"/>
           </a:solidFill>
-          <a:ln w="25400">
-            <a:solidFill>
-              <a:srgbClr val="C79123"/>
-            </a:solidFill>
-            <a:prstDash val="dash"/>
+          <a:ln>
+            <a:noFill/>
           </a:ln>
         </p:spPr>
         <p:txBody>
@@ -4910,8 +5197,8 @@
         </p:nvSpPr>
         <p:spPr>
           <a:xfrm>
-            <a:off x="777240" y="548640"/>
-            <a:ext cx="9357055" cy="822960"/>
+            <a:off x="868680" y="566928"/>
+            <a:ext cx="9448495" cy="868680"/>
           </a:xfrm>
         </p:spPr>
         <p:txBody>
@@ -4928,7 +5215,7 @@
             <a:r>
               <a:rPr sz="3000" b="1" i="0">
                 <a:solidFill>
-                  <a:srgbClr val="715214"/>
+                  <a:srgbClr val="26231F"/>
                 </a:solidFill>
               </a:rPr>
               <a:t>우리 가족의 약속</a:t>
@@ -4938,56 +5225,54 @@
       </p:sp>
       <p:sp>
         <p:nvSpPr>
-          <p:cNvPr id="4" name="줄 1"/>
+          <p:cNvPr id="6" name="줄 1"/>
           <p:cNvSpPr/>
           <p:nvPr/>
         </p:nvSpPr>
         <p:spPr>
           <a:xfrm>
-            <a:off x="777240" y="1554480"/>
-            <a:ext cx="10637215" cy="1005840"/>
+            <a:off x="640080" y="1783080"/>
+            <a:ext cx="10911535" cy="1005840"/>
           </a:xfrm>
           <a:prstGeom prst="roundRect">
             <a:avLst>
-              <a:gd name="adj" fmla="val 8000"/>
+              <a:gd name="adj" fmla="val 7000"/>
             </a:avLst>
           </a:prstGeom>
           <a:solidFill>
-            <a:srgbClr val="FCF7EE"/>
-          </a:solidFill>
-          <a:ln w="12700">
-            <a:solidFill>
-              <a:srgbClr val="F7E8C9"/>
-            </a:solidFill>
-          </a:ln>
-        </p:spPr>
-        <p:txBody>
-          <a:bodyPr rtlCol="0" anchor="ctr"/>
-          <a:lstStyle/>
-          <a:p>
-            <a:pPr algn="ctr"/>
-          </a:p>
-        </p:txBody>
-      </p:sp>
-      <p:sp>
-        <p:nvSpPr>
-          <p:cNvPr id="5" name="번호 1"/>
-          <p:cNvSpPr/>
-          <p:nvPr/>
-        </p:nvSpPr>
-        <p:spPr>
-          <a:xfrm>
-            <a:off x="960120" y="1828800"/>
-            <a:ext cx="457200" cy="457200"/>
-          </a:xfrm>
-          <a:prstGeom prst="ellipse">
-            <a:avLst/>
-          </a:prstGeom>
-          <a:solidFill>
-            <a:srgbClr val="C79123"/>
+            <a:srgbClr val="FBF6EC"/>
           </a:solidFill>
           <a:ln>
             <a:noFill/>
+          </a:ln>
+        </p:spPr>
+        <p:txBody>
+          <a:bodyPr rtlCol="0" anchor="ctr"/>
+          <a:lstStyle/>
+          <a:p>
+            <a:pPr algn="ctr"/>
+          </a:p>
+        </p:txBody>
+      </p:sp>
+      <p:sp>
+        <p:nvSpPr>
+          <p:cNvPr id="7" name="번호 1"/>
+          <p:cNvSpPr/>
+          <p:nvPr/>
+        </p:nvSpPr>
+        <p:spPr>
+          <a:xfrm>
+            <a:off x="822959" y="2057400"/>
+            <a:ext cx="457200" cy="457200"/>
+          </a:xfrm>
+          <a:prstGeom prst="ellipse">
+            <a:avLst/>
+          </a:prstGeom>
+          <a:noFill/>
+          <a:ln w="19050">
+            <a:solidFill>
+              <a:srgbClr val="D8B879"/>
+            </a:solidFill>
           </a:ln>
         </p:spPr>
         <p:txBody>
@@ -5004,7 +5289,7 @@
             <a:r>
               <a:rPr sz="1600" b="1" i="0">
                 <a:solidFill>
-                  <a:srgbClr val="FFFFFF"/>
+                  <a:srgbClr val="493E27"/>
                 </a:solidFill>
               </a:rPr>
               <a:t>1</a:t>
@@ -5014,13 +5299,13 @@
       </p:sp>
       <p:sp>
         <p:nvSpPr>
-          <p:cNvPr id="6" name="TextBox 5"/>
+          <p:cNvPr id="8" name="TextBox 7"/>
           <p:cNvSpPr txBox="1"/>
           <p:nvPr/>
         </p:nvSpPr>
         <p:spPr>
           <a:xfrm>
-            <a:off x="1645919" y="1600200"/>
+            <a:off x="1508760" y="1828800"/>
             <a:ext cx="2743200" cy="914400"/>
           </a:xfrm>
           <a:prstGeom prst="rect">
@@ -5042,7 +5327,7 @@
             <a:r>
               <a:rPr sz="1800" b="1" i="0">
                 <a:solidFill>
-                  <a:srgbClr val="715214"/>
+                  <a:srgbClr val="493E27"/>
                 </a:solidFill>
               </a:rPr>
               <a:t>약속 1</a:t>
@@ -5052,14 +5337,14 @@
       </p:sp>
       <p:sp>
         <p:nvSpPr>
-          <p:cNvPr id="7" name="TextBox 6"/>
+          <p:cNvPr id="9" name="TextBox 8"/>
           <p:cNvSpPr txBox="1"/>
           <p:nvPr/>
         </p:nvSpPr>
         <p:spPr>
           <a:xfrm>
-            <a:off x="4434840" y="1600200"/>
-            <a:ext cx="6796735" cy="914400"/>
+            <a:off x="4297680" y="1828800"/>
+            <a:ext cx="7071055" cy="914400"/>
           </a:xfrm>
           <a:prstGeom prst="rect">
             <a:avLst/>
@@ -5080,7 +5365,7 @@
             <a:r>
               <a:rPr sz="1700" b="0" i="0">
                 <a:solidFill>
-                  <a:srgbClr val="2B2B2B"/>
+                  <a:srgbClr val="26231F"/>
                 </a:solidFill>
               </a:rPr>
               <a:t>밥은 꼭 함께 먹기</a:t>
@@ -5090,56 +5375,54 @@
       </p:sp>
       <p:sp>
         <p:nvSpPr>
-          <p:cNvPr id="8" name="줄 2"/>
+          <p:cNvPr id="10" name="줄 2"/>
           <p:cNvSpPr/>
           <p:nvPr/>
         </p:nvSpPr>
         <p:spPr>
           <a:xfrm>
-            <a:off x="777240" y="2697480"/>
-            <a:ext cx="10637215" cy="1005840"/>
+            <a:off x="640080" y="2926080"/>
+            <a:ext cx="10911535" cy="1005840"/>
           </a:xfrm>
           <a:prstGeom prst="roundRect">
             <a:avLst>
-              <a:gd name="adj" fmla="val 8000"/>
+              <a:gd name="adj" fmla="val 7000"/>
             </a:avLst>
           </a:prstGeom>
           <a:solidFill>
-            <a:srgbClr val="FCF7EE"/>
-          </a:solidFill>
-          <a:ln w="12700">
-            <a:solidFill>
-              <a:srgbClr val="F7E8C9"/>
-            </a:solidFill>
-          </a:ln>
-        </p:spPr>
-        <p:txBody>
-          <a:bodyPr rtlCol="0" anchor="ctr"/>
-          <a:lstStyle/>
-          <a:p>
-            <a:pPr algn="ctr"/>
-          </a:p>
-        </p:txBody>
-      </p:sp>
-      <p:sp>
-        <p:nvSpPr>
-          <p:cNvPr id="9" name="번호 2"/>
-          <p:cNvSpPr/>
-          <p:nvPr/>
-        </p:nvSpPr>
-        <p:spPr>
-          <a:xfrm>
-            <a:off x="960120" y="2971800"/>
-            <a:ext cx="457200" cy="457200"/>
-          </a:xfrm>
-          <a:prstGeom prst="ellipse">
-            <a:avLst/>
-          </a:prstGeom>
-          <a:solidFill>
-            <a:srgbClr val="C79123"/>
+            <a:srgbClr val="FBF6EC"/>
           </a:solidFill>
           <a:ln>
             <a:noFill/>
+          </a:ln>
+        </p:spPr>
+        <p:txBody>
+          <a:bodyPr rtlCol="0" anchor="ctr"/>
+          <a:lstStyle/>
+          <a:p>
+            <a:pPr algn="ctr"/>
+          </a:p>
+        </p:txBody>
+      </p:sp>
+      <p:sp>
+        <p:nvSpPr>
+          <p:cNvPr id="11" name="번호 2"/>
+          <p:cNvSpPr/>
+          <p:nvPr/>
+        </p:nvSpPr>
+        <p:spPr>
+          <a:xfrm>
+            <a:off x="822959" y="3200400"/>
+            <a:ext cx="457200" cy="457200"/>
+          </a:xfrm>
+          <a:prstGeom prst="ellipse">
+            <a:avLst/>
+          </a:prstGeom>
+          <a:noFill/>
+          <a:ln w="19050">
+            <a:solidFill>
+              <a:srgbClr val="D8B879"/>
+            </a:solidFill>
           </a:ln>
         </p:spPr>
         <p:txBody>
@@ -5156,7 +5439,7 @@
             <a:r>
               <a:rPr sz="1600" b="1" i="0">
                 <a:solidFill>
-                  <a:srgbClr val="FFFFFF"/>
+                  <a:srgbClr val="493E27"/>
                 </a:solidFill>
               </a:rPr>
               <a:t>2</a:t>
@@ -5166,13 +5449,13 @@
       </p:sp>
       <p:sp>
         <p:nvSpPr>
-          <p:cNvPr id="10" name="TextBox 9"/>
+          <p:cNvPr id="12" name="TextBox 11"/>
           <p:cNvSpPr txBox="1"/>
           <p:nvPr/>
         </p:nvSpPr>
         <p:spPr>
           <a:xfrm>
-            <a:off x="1645919" y="2743200"/>
+            <a:off x="1508760" y="2971800"/>
             <a:ext cx="2743200" cy="914400"/>
           </a:xfrm>
           <a:prstGeom prst="rect">
@@ -5194,7 +5477,7 @@
             <a:r>
               <a:rPr sz="1800" b="1" i="0">
                 <a:solidFill>
-                  <a:srgbClr val="715214"/>
+                  <a:srgbClr val="493E27"/>
                 </a:solidFill>
               </a:rPr>
               <a:t>약속 2</a:t>
@@ -5204,14 +5487,14 @@
       </p:sp>
       <p:sp>
         <p:nvSpPr>
-          <p:cNvPr id="11" name="TextBox 10"/>
+          <p:cNvPr id="13" name="TextBox 12"/>
           <p:cNvSpPr txBox="1"/>
           <p:nvPr/>
         </p:nvSpPr>
         <p:spPr>
           <a:xfrm>
-            <a:off x="4434840" y="2743200"/>
-            <a:ext cx="6796735" cy="914400"/>
+            <a:off x="4297680" y="2971800"/>
+            <a:ext cx="7071055" cy="914400"/>
           </a:xfrm>
           <a:prstGeom prst="rect">
             <a:avLst/>
@@ -5232,7 +5515,7 @@
             <a:r>
               <a:rPr sz="1700" b="0" i="0">
                 <a:solidFill>
-                  <a:srgbClr val="2B2B2B"/>
+                  <a:srgbClr val="26231F"/>
                 </a:solidFill>
               </a:rPr>
               <a:t>잠들기 전에 사랑한다고 말하기</a:t>
@@ -5242,56 +5525,54 @@
       </p:sp>
       <p:sp>
         <p:nvSpPr>
-          <p:cNvPr id="12" name="줄 3"/>
+          <p:cNvPr id="14" name="줄 3"/>
           <p:cNvSpPr/>
           <p:nvPr/>
         </p:nvSpPr>
         <p:spPr>
           <a:xfrm>
-            <a:off x="777240" y="3840480"/>
-            <a:ext cx="10637215" cy="1005840"/>
+            <a:off x="640080" y="4069080"/>
+            <a:ext cx="10911535" cy="1005840"/>
           </a:xfrm>
           <a:prstGeom prst="roundRect">
             <a:avLst>
-              <a:gd name="adj" fmla="val 8000"/>
+              <a:gd name="adj" fmla="val 7000"/>
             </a:avLst>
           </a:prstGeom>
           <a:solidFill>
-            <a:srgbClr val="FCF7EE"/>
-          </a:solidFill>
-          <a:ln w="12700">
-            <a:solidFill>
-              <a:srgbClr val="F7E8C9"/>
-            </a:solidFill>
-          </a:ln>
-        </p:spPr>
-        <p:txBody>
-          <a:bodyPr rtlCol="0" anchor="ctr"/>
-          <a:lstStyle/>
-          <a:p>
-            <a:pPr algn="ctr"/>
-          </a:p>
-        </p:txBody>
-      </p:sp>
-      <p:sp>
-        <p:nvSpPr>
-          <p:cNvPr id="13" name="번호 3"/>
-          <p:cNvSpPr/>
-          <p:nvPr/>
-        </p:nvSpPr>
-        <p:spPr>
-          <a:xfrm>
-            <a:off x="960120" y="4114800"/>
-            <a:ext cx="457200" cy="457200"/>
-          </a:xfrm>
-          <a:prstGeom prst="ellipse">
-            <a:avLst/>
-          </a:prstGeom>
-          <a:solidFill>
-            <a:srgbClr val="C79123"/>
+            <a:srgbClr val="FBF6EC"/>
           </a:solidFill>
           <a:ln>
             <a:noFill/>
+          </a:ln>
+        </p:spPr>
+        <p:txBody>
+          <a:bodyPr rtlCol="0" anchor="ctr"/>
+          <a:lstStyle/>
+          <a:p>
+            <a:pPr algn="ctr"/>
+          </a:p>
+        </p:txBody>
+      </p:sp>
+      <p:sp>
+        <p:nvSpPr>
+          <p:cNvPr id="15" name="번호 3"/>
+          <p:cNvSpPr/>
+          <p:nvPr/>
+        </p:nvSpPr>
+        <p:spPr>
+          <a:xfrm>
+            <a:off x="822959" y="4343400"/>
+            <a:ext cx="457200" cy="457200"/>
+          </a:xfrm>
+          <a:prstGeom prst="ellipse">
+            <a:avLst/>
+          </a:prstGeom>
+          <a:noFill/>
+          <a:ln w="19050">
+            <a:solidFill>
+              <a:srgbClr val="D8B879"/>
+            </a:solidFill>
           </a:ln>
         </p:spPr>
         <p:txBody>
@@ -5308,7 +5589,7 @@
             <a:r>
               <a:rPr sz="1600" b="1" i="0">
                 <a:solidFill>
-                  <a:srgbClr val="FFFFFF"/>
+                  <a:srgbClr val="493E27"/>
                 </a:solidFill>
               </a:rPr>
               <a:t>3</a:t>
@@ -5318,13 +5599,13 @@
       </p:sp>
       <p:sp>
         <p:nvSpPr>
-          <p:cNvPr id="14" name="TextBox 13"/>
+          <p:cNvPr id="16" name="TextBox 15"/>
           <p:cNvSpPr txBox="1"/>
           <p:nvPr/>
         </p:nvSpPr>
         <p:spPr>
           <a:xfrm>
-            <a:off x="1645919" y="3886200"/>
+            <a:off x="1508760" y="4114800"/>
             <a:ext cx="2743200" cy="914400"/>
           </a:xfrm>
           <a:prstGeom prst="rect">
@@ -5346,7 +5627,7 @@
             <a:r>
               <a:rPr sz="1800" b="1" i="0">
                 <a:solidFill>
-                  <a:srgbClr val="715214"/>
+                  <a:srgbClr val="493E27"/>
                 </a:solidFill>
               </a:rPr>
               <a:t>약속 3</a:t>
@@ -5356,14 +5637,14 @@
       </p:sp>
       <p:sp>
         <p:nvSpPr>
-          <p:cNvPr id="15" name="TextBox 14"/>
+          <p:cNvPr id="17" name="TextBox 16"/>
           <p:cNvSpPr txBox="1"/>
           <p:nvPr/>
         </p:nvSpPr>
         <p:spPr>
           <a:xfrm>
-            <a:off x="4434840" y="3886200"/>
-            <a:ext cx="6796735" cy="914400"/>
+            <a:off x="4297680" y="4114800"/>
+            <a:ext cx="7071055" cy="914400"/>
           </a:xfrm>
           <a:prstGeom prst="rect">
             <a:avLst/>
@@ -5384,7 +5665,7 @@
             <a:r>
               <a:rPr sz="1700" b="0" i="0">
                 <a:solidFill>
-                  <a:srgbClr val="2B2B2B"/>
+                  <a:srgbClr val="26231F"/>
                 </a:solidFill>
               </a:rPr>
               <a:t>주말에는 함께 산책하기</a:t>
@@ -5406,7 +5687,7 @@
     <p:bg>
       <p:bgPr>
         <a:solidFill>
-          <a:srgbClr val="F7E8C9"/>
+          <a:srgbClr val="FFFFFF"/>
         </a:solidFill>
         <a:effectLst/>
       </p:bgPr>
@@ -5426,20 +5707,86 @@
         </p:nvSpPr>
         <p:spPr>
           <a:xfrm>
-            <a:off x="274320" y="274320"/>
-            <a:ext cx="11643055" cy="6309360"/>
+            <a:off x="640080" y="566928"/>
+            <a:ext cx="64008" cy="868680"/>
+          </a:xfrm>
+          <a:prstGeom prst="roundRect">
+            <a:avLst>
+              <a:gd name="adj" fmla="val 50000"/>
+            </a:avLst>
+          </a:prstGeom>
+          <a:solidFill>
+            <a:srgbClr val="D8B879"/>
+          </a:solidFill>
+          <a:ln>
+            <a:noFill/>
+          </a:ln>
+        </p:spPr>
+        <p:txBody>
+          <a:bodyPr rtlCol="0" anchor="ctr"/>
+          <a:lstStyle/>
+          <a:p>
+            <a:pPr algn="ctr"/>
+          </a:p>
+        </p:txBody>
+      </p:sp>
+      <p:sp>
+        <p:nvSpPr>
+          <p:cNvPr id="4" name="상단 라벨"/>
+          <p:cNvSpPr txBox="1"/>
+          <p:nvPr/>
+        </p:nvSpPr>
+        <p:spPr>
+          <a:xfrm>
+            <a:off x="868680" y="274320"/>
+            <a:ext cx="5486400" cy="274320"/>
           </a:xfrm>
           <a:prstGeom prst="rect">
             <a:avLst/>
           </a:prstGeom>
+          <a:noFill/>
+        </p:spPr>
+        <p:txBody>
+          <a:bodyPr wrap="square" lIns="54864" rIns="54864" tIns="27432" bIns="27432" anchor="ctr">
+            <a:noAutofit/>
+          </a:bodyPr>
+          <a:lstStyle/>
+          <a:p>
+            <a:pPr algn="l">
+              <a:lnSpc>
+                <a:spcPct val="115000"/>
+              </a:lnSpc>
+            </a:pPr>
+            <a:r>
+              <a:rPr sz="900" b="1" i="0" spc="250">
+                <a:solidFill>
+                  <a:srgbClr val="8E8780"/>
+                </a:solidFill>
+              </a:rPr>
+              <a:t>FAMILY ALBUM</a:t>
+            </a:r>
+          </a:p>
+        </p:txBody>
+      </p:sp>
+      <p:sp>
+        <p:nvSpPr>
+          <p:cNvPr id="5" name="포인트"/>
+          <p:cNvSpPr/>
+          <p:nvPr/>
+        </p:nvSpPr>
+        <p:spPr>
+          <a:xfrm>
+            <a:off x="11167567" y="667512"/>
+            <a:ext cx="310896" cy="310896"/>
+          </a:xfrm>
+          <a:prstGeom prst="moon">
+            <a:avLst/>
+          </a:prstGeom>
           <a:solidFill>
-            <a:srgbClr val="FFFFFF"/>
+            <a:srgbClr val="EBD6AD"/>
           </a:solidFill>
-          <a:ln w="25400">
-            <a:solidFill>
-              <a:srgbClr val="C79123"/>
-            </a:solidFill>
-            <a:prstDash val="dash"/>
+          <a:ln>
+            <a:noFill/>
           </a:ln>
         </p:spPr>
         <p:txBody>
@@ -5462,8 +5809,8 @@
         </p:nvSpPr>
         <p:spPr>
           <a:xfrm>
-            <a:off x="777240" y="548640"/>
-            <a:ext cx="9357055" cy="822960"/>
+            <a:off x="868680" y="566928"/>
+            <a:ext cx="9448495" cy="868680"/>
           </a:xfrm>
         </p:spPr>
         <p:txBody>
@@ -5480,7 +5827,7 @@
             <a:r>
               <a:rPr sz="3000" b="1" i="0">
                 <a:solidFill>
-                  <a:srgbClr val="715214"/>
+                  <a:srgbClr val="26231F"/>
                 </a:solidFill>
               </a:rPr>
               <a:t>가족 사진</a:t>
@@ -5490,14 +5837,14 @@
       </p:sp>
       <p:sp>
         <p:nvSpPr>
-          <p:cNvPr id="4" name="사진 자리"/>
+          <p:cNvPr id="6" name="사진 자리"/>
           <p:cNvSpPr/>
           <p:nvPr/>
         </p:nvSpPr>
         <p:spPr>
           <a:xfrm>
-            <a:off x="777240" y="1554480"/>
-            <a:ext cx="3423818" cy="2240279"/>
+            <a:off x="640080" y="1783080"/>
+            <a:ext cx="3515258" cy="2194560"/>
           </a:xfrm>
           <a:prstGeom prst="roundRect">
             <a:avLst>
@@ -5505,12 +5852,10 @@
             </a:avLst>
           </a:prstGeom>
           <a:solidFill>
-            <a:srgbClr val="F7E8C9"/>
+            <a:srgbClr val="F6EBD5"/>
           </a:solidFill>
           <a:ln w="19050">
-            <a:solidFill>
-              <a:srgbClr val="C79123"/>
-            </a:solidFill>
+            <a:noFill/>
             <a:prstDash val="dash"/>
           </a:ln>
         </p:spPr>
@@ -5528,7 +5873,7 @@
             <a:r>
               <a:rPr sz="1200" b="0" i="0">
                 <a:solidFill>
-                  <a:srgbClr val="715214"/>
+                  <a:srgbClr val="8E8780"/>
                 </a:solidFill>
               </a:rPr>
               <a:t>사진 1</a:t>
@@ -5538,14 +5883,14 @@
       </p:sp>
       <p:sp>
         <p:nvSpPr>
-          <p:cNvPr id="5" name="사진 자리"/>
+          <p:cNvPr id="7" name="사진 자리"/>
           <p:cNvSpPr/>
           <p:nvPr/>
         </p:nvSpPr>
         <p:spPr>
           <a:xfrm>
-            <a:off x="4383938" y="1554480"/>
-            <a:ext cx="3423818" cy="2240279"/>
+            <a:off x="4338218" y="1783080"/>
+            <a:ext cx="3515258" cy="2194560"/>
           </a:xfrm>
           <a:prstGeom prst="roundRect">
             <a:avLst>
@@ -5553,12 +5898,10 @@
             </a:avLst>
           </a:prstGeom>
           <a:solidFill>
-            <a:srgbClr val="F7E8C9"/>
+            <a:srgbClr val="F6EBD5"/>
           </a:solidFill>
           <a:ln w="19050">
-            <a:solidFill>
-              <a:srgbClr val="C79123"/>
-            </a:solidFill>
+            <a:noFill/>
             <a:prstDash val="dash"/>
           </a:ln>
         </p:spPr>
@@ -5576,7 +5919,7 @@
             <a:r>
               <a:rPr sz="1200" b="0" i="0">
                 <a:solidFill>
-                  <a:srgbClr val="715214"/>
+                  <a:srgbClr val="8E8780"/>
                 </a:solidFill>
               </a:rPr>
               <a:t>사진 2</a:t>
@@ -5586,14 +5929,14 @@
       </p:sp>
       <p:sp>
         <p:nvSpPr>
-          <p:cNvPr id="6" name="사진 자리"/>
+          <p:cNvPr id="8" name="사진 자리"/>
           <p:cNvSpPr/>
           <p:nvPr/>
         </p:nvSpPr>
         <p:spPr>
           <a:xfrm>
-            <a:off x="7990636" y="1554480"/>
-            <a:ext cx="3423818" cy="2240279"/>
+            <a:off x="8036356" y="1783080"/>
+            <a:ext cx="3515258" cy="2194560"/>
           </a:xfrm>
           <a:prstGeom prst="roundRect">
             <a:avLst>
@@ -5601,12 +5944,10 @@
             </a:avLst>
           </a:prstGeom>
           <a:solidFill>
-            <a:srgbClr val="F7E8C9"/>
+            <a:srgbClr val="F6EBD5"/>
           </a:solidFill>
           <a:ln w="19050">
-            <a:solidFill>
-              <a:srgbClr val="C79123"/>
-            </a:solidFill>
+            <a:noFill/>
             <a:prstDash val="dash"/>
           </a:ln>
         </p:spPr>
@@ -5624,7 +5965,7 @@
             <a:r>
               <a:rPr sz="1200" b="0" i="0">
                 <a:solidFill>
-                  <a:srgbClr val="715214"/>
+                  <a:srgbClr val="8E8780"/>
                 </a:solidFill>
               </a:rPr>
               <a:t>사진 3</a:t>
@@ -5634,14 +5975,14 @@
       </p:sp>
       <p:sp>
         <p:nvSpPr>
-          <p:cNvPr id="7" name="사진 자리"/>
+          <p:cNvPr id="9" name="사진 자리"/>
           <p:cNvSpPr/>
           <p:nvPr/>
         </p:nvSpPr>
         <p:spPr>
           <a:xfrm>
-            <a:off x="777240" y="3977639"/>
-            <a:ext cx="3423818" cy="2240279"/>
+            <a:off x="640080" y="4160520"/>
+            <a:ext cx="3515258" cy="2194560"/>
           </a:xfrm>
           <a:prstGeom prst="roundRect">
             <a:avLst>
@@ -5649,12 +5990,10 @@
             </a:avLst>
           </a:prstGeom>
           <a:solidFill>
-            <a:srgbClr val="F7E8C9"/>
+            <a:srgbClr val="F6EBD5"/>
           </a:solidFill>
           <a:ln w="19050">
-            <a:solidFill>
-              <a:srgbClr val="C79123"/>
-            </a:solidFill>
+            <a:noFill/>
             <a:prstDash val="dash"/>
           </a:ln>
         </p:spPr>
@@ -5672,7 +6011,7 @@
             <a:r>
               <a:rPr sz="1200" b="0" i="0">
                 <a:solidFill>
-                  <a:srgbClr val="715214"/>
+                  <a:srgbClr val="8E8780"/>
                 </a:solidFill>
               </a:rPr>
               <a:t>사진 4</a:t>
@@ -5682,14 +6021,14 @@
       </p:sp>
       <p:sp>
         <p:nvSpPr>
-          <p:cNvPr id="8" name="사진 자리"/>
+          <p:cNvPr id="10" name="사진 자리"/>
           <p:cNvSpPr/>
           <p:nvPr/>
         </p:nvSpPr>
         <p:spPr>
           <a:xfrm>
-            <a:off x="4383938" y="3977639"/>
-            <a:ext cx="3423818" cy="2240279"/>
+            <a:off x="4338218" y="4160520"/>
+            <a:ext cx="3515258" cy="2194560"/>
           </a:xfrm>
           <a:prstGeom prst="roundRect">
             <a:avLst>
@@ -5697,12 +6036,10 @@
             </a:avLst>
           </a:prstGeom>
           <a:solidFill>
-            <a:srgbClr val="F7E8C9"/>
+            <a:srgbClr val="F6EBD5"/>
           </a:solidFill>
           <a:ln w="19050">
-            <a:solidFill>
-              <a:srgbClr val="C79123"/>
-            </a:solidFill>
+            <a:noFill/>
             <a:prstDash val="dash"/>
           </a:ln>
         </p:spPr>
@@ -5720,7 +6057,7 @@
             <a:r>
               <a:rPr sz="1200" b="0" i="0">
                 <a:solidFill>
-                  <a:srgbClr val="715214"/>
+                  <a:srgbClr val="8E8780"/>
                 </a:solidFill>
               </a:rPr>
               <a:t>사진 5</a:t>
@@ -5730,14 +6067,14 @@
       </p:sp>
       <p:sp>
         <p:nvSpPr>
-          <p:cNvPr id="9" name="사진 자리"/>
+          <p:cNvPr id="11" name="사진 자리"/>
           <p:cNvSpPr/>
           <p:nvPr/>
         </p:nvSpPr>
         <p:spPr>
           <a:xfrm>
-            <a:off x="7990636" y="3977639"/>
-            <a:ext cx="3423818" cy="2240279"/>
+            <a:off x="8036356" y="4160520"/>
+            <a:ext cx="3515258" cy="2194560"/>
           </a:xfrm>
           <a:prstGeom prst="roundRect">
             <a:avLst>
@@ -5745,12 +6082,10 @@
             </a:avLst>
           </a:prstGeom>
           <a:solidFill>
-            <a:srgbClr val="F7E8C9"/>
+            <a:srgbClr val="F6EBD5"/>
           </a:solidFill>
           <a:ln w="19050">
-            <a:solidFill>
-              <a:srgbClr val="C79123"/>
-            </a:solidFill>
+            <a:noFill/>
             <a:prstDash val="dash"/>
           </a:ln>
         </p:spPr>
@@ -5768,7 +6103,7 @@
             <a:r>
               <a:rPr sz="1200" b="0" i="0">
                 <a:solidFill>
-                  <a:srgbClr val="715214"/>
+                  <a:srgbClr val="8E8780"/>
                 </a:solidFill>
               </a:rPr>
               <a:t>사진 6</a:t>
@@ -5787,6 +6122,14 @@
 <file path=ppt/slides/slide6.xml><?xml version="1.0" encoding="utf-8"?>
 <p:sld xmlns:a="http://schemas.openxmlformats.org/drawingml/2006/main" xmlns:p="http://schemas.openxmlformats.org/presentationml/2006/main" xmlns:r="http://schemas.openxmlformats.org/officeDocument/2006/relationships">
   <p:cSld>
+    <p:bg>
+      <p:bgPr>
+        <a:solidFill>
+          <a:srgbClr val="FBF6EC"/>
+        </a:solidFill>
+        <a:effectLst/>
+      </p:bgPr>
+    </p:bg>
     <p:spTree>
       <p:nvGrpSpPr>
         <p:cNvPr id="1" name=""/>
@@ -5794,30 +6137,119 @@
         <p:nvPr/>
       </p:nvGrpSpPr>
       <p:grpSpPr/>
-      <p:pic>
-        <p:nvPicPr>
-          <p:cNvPr id="3" name="표지 그림" descr="family-27.jpg"/>
-          <p:cNvPicPr>
-            <a:picLocks noChangeAspect="1"/>
-          </p:cNvPicPr>
-          <p:nvPr/>
-        </p:nvPicPr>
-        <p:blipFill>
-          <a:blip r:embed="rId2"/>
-          <a:stretch>
-            <a:fillRect/>
-          </a:stretch>
-        </p:blipFill>
-        <p:spPr>
-          <a:xfrm>
-            <a:off x="0" y="0"/>
-            <a:ext cx="12191695" cy="6858000"/>
+      <p:sp>
+        <p:nvSpPr>
+          <p:cNvPr id="3" name="사진 자리"/>
+          <p:cNvSpPr/>
+          <p:nvPr/>
+        </p:nvSpPr>
+        <p:spPr>
+          <a:xfrm>
+            <a:off x="1463003" y="685800"/>
+            <a:ext cx="3169840" cy="5486400"/>
+          </a:xfrm>
+          <a:prstGeom prst="round2SameRect">
+            <a:avLst>
+              <a:gd name="adj1" fmla="val 50000"/>
+              <a:gd name="adj2" fmla="val 0"/>
+            </a:avLst>
+          </a:prstGeom>
+          <a:solidFill>
+            <a:srgbClr val="EBD6AD"/>
+          </a:solidFill>
+          <a:ln>
+            <a:noFill/>
+          </a:ln>
+        </p:spPr>
+        <p:txBody>
+          <a:bodyPr rtlCol="0" anchor="ctr" wrap="square" lIns="54864" rIns="54864" tIns="27432" bIns="27432">
+            <a:noAutofit/>
+          </a:bodyPr>
+          <a:lstStyle/>
+          <a:p>
+            <a:pPr algn="ctr">
+              <a:lnSpc>
+                <a:spcPct val="100000"/>
+              </a:lnSpc>
+            </a:pPr>
+            <a:r>
+              <a:rPr sz="1400" b="0" i="0">
+                <a:solidFill>
+                  <a:srgbClr val="493E27"/>
+                </a:solidFill>
+              </a:rPr>
+              <a:t>사진을 넣어 주세요</a:t>
+            </a:r>
+          </a:p>
+        </p:txBody>
+      </p:sp>
+      <p:sp>
+        <p:nvSpPr>
+          <p:cNvPr id="4" name="장식"/>
+          <p:cNvSpPr/>
+          <p:nvPr/>
+        </p:nvSpPr>
+        <p:spPr>
+          <a:xfrm>
+            <a:off x="4358505" y="4251960"/>
+            <a:ext cx="1005840" cy="1005840"/>
+          </a:xfrm>
+          <a:prstGeom prst="ellipse">
+            <a:avLst/>
+          </a:prstGeom>
+          <a:solidFill>
+            <a:srgbClr val="EBD6AD"/>
+          </a:solidFill>
+          <a:ln>
+            <a:noFill/>
+          </a:ln>
+        </p:spPr>
+        <p:txBody>
+          <a:bodyPr rtlCol="0" anchor="ctr"/>
+          <a:lstStyle/>
+          <a:p>
+            <a:pPr algn="ctr"/>
+          </a:p>
+        </p:txBody>
+      </p:sp>
+      <p:sp>
+        <p:nvSpPr>
+          <p:cNvPr id="5" name="라벨"/>
+          <p:cNvSpPr txBox="1"/>
+          <p:nvPr/>
+        </p:nvSpPr>
+        <p:spPr>
+          <a:xfrm>
+            <a:off x="6827349" y="2148840"/>
+            <a:ext cx="4632844" cy="274320"/>
           </a:xfrm>
           <a:prstGeom prst="rect">
             <a:avLst/>
           </a:prstGeom>
-        </p:spPr>
-      </p:pic>
+          <a:noFill/>
+        </p:spPr>
+        <p:txBody>
+          <a:bodyPr wrap="square" lIns="54864" rIns="54864" tIns="27432" bIns="27432" anchor="t">
+            <a:noAutofit/>
+          </a:bodyPr>
+          <a:lstStyle/>
+          <a:p>
+            <a:pPr algn="l">
+              <a:lnSpc>
+                <a:spcPct val="115000"/>
+              </a:lnSpc>
+            </a:pPr>
+            <a:r>
+              <a:rPr sz="1000" b="1" i="0" spc="250">
+                <a:solidFill>
+                  <a:srgbClr val="26231F"/>
+                </a:solidFill>
+              </a:rPr>
+              <a:t>FAMILY ALBUM</a:t>
+            </a:r>
+          </a:p>
+        </p:txBody>
+      </p:sp>
       <p:sp>
         <p:nvSpPr>
           <p:cNvPr id="2" name="Title 1"/>
@@ -5830,8 +6262,8 @@
         </p:nvSpPr>
         <p:spPr>
           <a:xfrm>
-            <a:off x="853418" y="2057400"/>
-            <a:ext cx="6095847" cy="1554480"/>
+            <a:off x="6827349" y="2606040"/>
+            <a:ext cx="4632844" cy="1188720"/>
           </a:xfrm>
         </p:spPr>
         <p:txBody>
@@ -5846,9 +6278,9 @@
               </a:lnSpc>
             </a:pPr>
             <a:r>
-              <a:rPr sz="3600" b="1" i="0">
-                <a:solidFill>
-                  <a:srgbClr val="715214"/>
+              <a:rPr sz="4000" b="1" i="0">
+                <a:solidFill>
+                  <a:srgbClr val="26231F"/>
                 </a:solidFill>
               </a:rPr>
               <a:t>우리 가족 소개를 마칩니다</a:t>
@@ -5858,14 +6290,14 @@
       </p:sp>
       <p:sp>
         <p:nvSpPr>
-          <p:cNvPr id="4" name="한 줄 문구"/>
+          <p:cNvPr id="6" name="한 줄 문구"/>
           <p:cNvSpPr txBox="1"/>
           <p:nvPr/>
         </p:nvSpPr>
         <p:spPr>
           <a:xfrm>
-            <a:off x="853418" y="3749039"/>
-            <a:ext cx="6095847" cy="822960"/>
+            <a:off x="6827349" y="3886200"/>
+            <a:ext cx="4632844" cy="822960"/>
           </a:xfrm>
           <a:prstGeom prst="rect">
             <a:avLst/>
@@ -5884,9 +6316,9 @@
               </a:lnSpc>
             </a:pPr>
             <a:r>
-              <a:rPr sz="1700" b="0" i="1">
-                <a:solidFill>
-                  <a:srgbClr val="715214"/>
+              <a:rPr sz="1700" b="0" i="0">
+                <a:solidFill>
+                  <a:srgbClr val="26231F"/>
                 </a:solidFill>
               </a:rPr>
               <a:t>읽어 주셔서 고맙습니다</a:t>
@@ -5896,14 +6328,14 @@
       </p:sp>
       <p:sp>
         <p:nvSpPr>
-          <p:cNvPr id="5" name="안내 문구"/>
+          <p:cNvPr id="7" name="안내 문구"/>
           <p:cNvSpPr txBox="1"/>
           <p:nvPr/>
         </p:nvSpPr>
         <p:spPr>
           <a:xfrm>
-            <a:off x="853418" y="4617720"/>
-            <a:ext cx="6095847" cy="914400"/>
+            <a:off x="6827349" y="4754880"/>
+            <a:ext cx="4632844" cy="914400"/>
           </a:xfrm>
           <a:prstGeom prst="rect">
             <a:avLst/>
@@ -5924,7 +6356,7 @@
             <a:r>
               <a:rPr sz="1400" b="0" i="0">
                 <a:solidFill>
-                  <a:srgbClr val="666666"/>
+                  <a:srgbClr val="26231F"/>
                 </a:solidFill>
               </a:rPr>
               <a:t>고맙습니다 · 가족 이름</a:t>
@@ -5951,34 +6383,34 @@
         <a:sysClr val="window" lastClr="FFFFFF"/>
       </a:lt1>
       <a:dk2>
-        <a:srgbClr val="715214"/>
+        <a:srgbClr val="493E27"/>
       </a:dk2>
       <a:lt2>
-        <a:srgbClr val="FCF7EE"/>
+        <a:srgbClr val="FBF6EC"/>
       </a:lt2>
       <a:accent1>
-        <a:srgbClr val="C79123"/>
+        <a:srgbClr val="D8B879"/>
       </a:accent1>
       <a:accent2>
-        <a:srgbClr val="3B8391"/>
+        <a:srgbClr val="D7E198"/>
       </a:accent2>
       <a:accent3>
-        <a:srgbClr val="715214"/>
+        <a:srgbClr val="493E27"/>
       </a:accent3>
       <a:accent4>
-        <a:srgbClr val="F7E8C9"/>
+        <a:srgbClr val="F6EBD5"/>
       </a:accent4>
       <a:accent5>
-        <a:srgbClr val="818A5A"/>
+        <a:srgbClr val="D8CC88"/>
       </a:accent5>
       <a:accent6>
-        <a:srgbClr val="AA9772"/>
+        <a:srgbClr val="928B7D"/>
       </a:accent6>
       <a:hlink>
-        <a:srgbClr val="C79123"/>
+        <a:srgbClr val="D8B879"/>
       </a:hlink>
       <a:folHlink>
-        <a:srgbClr val="715214"/>
+        <a:srgbClr val="493E27"/>
       </a:folHlink>
     </a:clrScheme>
     <a:fontScheme name="Office">
